--- a/FitBin.pptx
+++ b/FitBin.pptx
@@ -6,6 +6,7 @@
   </p:sldMasterIdLst>
   <p:sldIdLst>
     <p:sldId id="256" r:id="rId2"/>
+    <p:sldId id="257" r:id="rId3"/>
   </p:sldIdLst>
   <p:sldSz cx="12192000" cy="6858000"/>
   <p:notesSz cx="6858000" cy="9144000"/>
@@ -104,6 +105,11 @@
       </a:defRPr>
     </a:lvl9pPr>
   </p:defaultTextStyle>
+  <p:extLst>
+    <p:ext uri="{EFAFB233-063F-42B5-8137-9DF3F51BA10A}">
+      <p15:sldGuideLst xmlns:p15="http://schemas.microsoft.com/office/powerpoint/2012/main"/>
+    </p:ext>
+  </p:extLst>
 </p:presentation>
 </file>
 
@@ -3767,6 +3773,86 @@
 </p:sld>
 </file>
 
+<file path=ppt/slides/slide2.xml><?xml version="1.0" encoding="utf-8"?>
+<p:sld xmlns:a="http://schemas.openxmlformats.org/drawingml/2006/main" xmlns:r="http://schemas.openxmlformats.org/officeDocument/2006/relationships" xmlns:p="http://schemas.openxmlformats.org/presentationml/2006/main">
+  <p:cSld>
+    <p:spTree>
+      <p:nvGrpSpPr>
+        <p:cNvPr id="1" name=""/>
+        <p:cNvGrpSpPr/>
+        <p:nvPr/>
+      </p:nvGrpSpPr>
+      <p:grpSpPr>
+        <a:xfrm>
+          <a:off x="0" y="0"/>
+          <a:ext cx="0" cy="0"/>
+          <a:chOff x="0" y="0"/>
+          <a:chExt cx="0" cy="0"/>
+        </a:xfrm>
+      </p:grpSpPr>
+      <p:sp>
+        <p:nvSpPr>
+          <p:cNvPr id="2" name="Titre 1">
+            <a:extLst>
+              <a:ext uri="{FF2B5EF4-FFF2-40B4-BE49-F238E27FC236}">
+                <a16:creationId xmlns:a16="http://schemas.microsoft.com/office/drawing/2014/main" id="{7AF87ADD-8F05-0088-AB9E-6AA08BA061E5}"/>
+              </a:ext>
+            </a:extLst>
+          </p:cNvPr>
+          <p:cNvSpPr>
+            <a:spLocks noGrp="1"/>
+          </p:cNvSpPr>
+          <p:nvPr>
+            <p:ph type="title"/>
+          </p:nvPr>
+        </p:nvSpPr>
+        <p:spPr/>
+        <p:txBody>
+          <a:bodyPr/>
+          <a:lstStyle/>
+          <a:p>
+            <a:endParaRPr lang="fr-CA"/>
+          </a:p>
+        </p:txBody>
+      </p:sp>
+      <p:sp>
+        <p:nvSpPr>
+          <p:cNvPr id="3" name="Espace réservé du contenu 2">
+            <a:extLst>
+              <a:ext uri="{FF2B5EF4-FFF2-40B4-BE49-F238E27FC236}">
+                <a16:creationId xmlns:a16="http://schemas.microsoft.com/office/drawing/2014/main" id="{B6BCC3F3-4B7C-C182-461C-3A5E8963FD5E}"/>
+              </a:ext>
+            </a:extLst>
+          </p:cNvPr>
+          <p:cNvSpPr>
+            <a:spLocks noGrp="1"/>
+          </p:cNvSpPr>
+          <p:nvPr>
+            <p:ph idx="1"/>
+          </p:nvPr>
+        </p:nvSpPr>
+        <p:spPr/>
+        <p:txBody>
+          <a:bodyPr/>
+          <a:lstStyle/>
+          <a:p>
+            <a:endParaRPr lang="fr-CA"/>
+          </a:p>
+        </p:txBody>
+      </p:sp>
+    </p:spTree>
+    <p:extLst>
+      <p:ext uri="{BB962C8B-B14F-4D97-AF65-F5344CB8AC3E}">
+        <p14:creationId xmlns:p14="http://schemas.microsoft.com/office/powerpoint/2010/main" val="153789946"/>
+      </p:ext>
+    </p:extLst>
+  </p:cSld>
+  <p:clrMapOvr>
+    <a:masterClrMapping/>
+  </p:clrMapOvr>
+</p:sld>
+</file>
+
 <file path=ppt/theme/theme1.xml><?xml version="1.0" encoding="utf-8"?>
 <a:theme xmlns:a="http://schemas.openxmlformats.org/drawingml/2006/main" name="Thème Office">
   <a:themeElements>

--- a/FitBin.pptx
+++ b/FitBin.pptx
@@ -7,6 +7,11 @@
   <p:sldIdLst>
     <p:sldId id="256" r:id="rId2"/>
     <p:sldId id="257" r:id="rId3"/>
+    <p:sldId id="258" r:id="rId4"/>
+    <p:sldId id="259" r:id="rId5"/>
+    <p:sldId id="260" r:id="rId6"/>
+    <p:sldId id="261" r:id="rId7"/>
+    <p:sldId id="262" r:id="rId8"/>
   </p:sldIdLst>
   <p:sldSz cx="12192000" cy="6858000"/>
   <p:notesSz cx="6858000" cy="9144000"/>
@@ -3385,10 +3390,10 @@
       </p:pic>
       <p:pic>
         <p:nvPicPr>
-          <p:cNvPr id="1032" name="Picture 8" descr="To create a &quot;vignette&quot; with the gradients tools - Pre-V2 Archive of iPad  Questions - Affinity | Forum">
-            <a:extLst>
-              <a:ext uri="{FF2B5EF4-FFF2-40B4-BE49-F238E27FC236}">
-                <a16:creationId xmlns:a16="http://schemas.microsoft.com/office/drawing/2014/main" id="{0C195102-39B5-E658-EE1F-64B93041FA85}"/>
+          <p:cNvPr id="5" name="Picture 8" descr="To create a &quot;vignette&quot; with the gradients tools - Pre-V2 Archive of iPad  Questions - Affinity | Forum">
+            <a:extLst>
+              <a:ext uri="{FF2B5EF4-FFF2-40B4-BE49-F238E27FC236}">
+                <a16:creationId xmlns:a16="http://schemas.microsoft.com/office/drawing/2014/main" id="{900CEB19-42A9-61CA-BEB5-90AF33BBF5EA}"/>
               </a:ext>
             </a:extLst>
           </p:cNvPr>
@@ -3431,6 +3436,53 @@
           </a:extLst>
         </p:spPr>
       </p:pic>
+      <p:pic>
+        <p:nvPicPr>
+          <p:cNvPr id="2050" name="Picture 2" descr="Search Bar Icon PNGs for Free Download">
+            <a:extLst>
+              <a:ext uri="{FF2B5EF4-FFF2-40B4-BE49-F238E27FC236}">
+                <a16:creationId xmlns:a16="http://schemas.microsoft.com/office/drawing/2014/main" id="{5178C310-2D79-B4A8-9086-B43307728D81}"/>
+              </a:ext>
+            </a:extLst>
+          </p:cNvPr>
+          <p:cNvPicPr>
+            <a:picLocks noChangeAspect="1" noChangeArrowheads="1"/>
+          </p:cNvPicPr>
+          <p:nvPr/>
+        </p:nvPicPr>
+        <p:blipFill>
+          <a:blip r:embed="rId5">
+            <a:extLst>
+              <a:ext uri="{28A0092B-C50C-407E-A947-70E740481C1C}">
+                <a14:useLocalDpi xmlns:a14="http://schemas.microsoft.com/office/drawing/2010/main" val="0"/>
+              </a:ext>
+            </a:extLst>
+          </a:blip>
+          <a:srcRect/>
+          <a:stretch>
+            <a:fillRect/>
+          </a:stretch>
+        </p:blipFill>
+        <p:spPr bwMode="auto">
+          <a:xfrm>
+            <a:off x="2924269" y="476251"/>
+            <a:ext cx="9105806" cy="4552903"/>
+          </a:xfrm>
+          <a:prstGeom prst="rect">
+            <a:avLst/>
+          </a:prstGeom>
+          <a:noFill/>
+          <a:extLst>
+            <a:ext uri="{909E8E84-426E-40DD-AFC4-6F175D3DCCD1}">
+              <a14:hiddenFill xmlns:a14="http://schemas.microsoft.com/office/drawing/2010/main">
+                <a:solidFill>
+                  <a:srgbClr val="FFFFFF"/>
+                </a:solidFill>
+              </a14:hiddenFill>
+            </a:ext>
+          </a:extLst>
+        </p:spPr>
+      </p:pic>
       <p:sp>
         <p:nvSpPr>
           <p:cNvPr id="2" name="Titre 1">
@@ -3449,8 +3501,8 @@
         </p:nvSpPr>
         <p:spPr>
           <a:xfrm>
-            <a:off x="2771869" y="971551"/>
-            <a:ext cx="8408624" cy="3009900"/>
+            <a:off x="3962399" y="633366"/>
+            <a:ext cx="7724776" cy="2867026"/>
           </a:xfrm>
         </p:spPr>
         <p:txBody>
@@ -3460,28 +3512,14 @@
           <a:lstStyle/>
           <a:p>
             <a:r>
-              <a:rPr lang="fr-CA" sz="19900" i="1" kern="0" spc="-700" dirty="0">
+              <a:rPr lang="fr-CA" sz="9600" i="1" kern="0" spc="-700" dirty="0">
                 <a:latin typeface="Arial Rounded MT Bold" panose="020F0704030504030204" pitchFamily="34" charset="0"/>
               </a:rPr>
-              <a:t>Fit</a:t>
-            </a:r>
-            <a:r>
-              <a:rPr lang="fr-CA" sz="19900" i="1" kern="0" spc="-700" dirty="0">
-                <a:solidFill>
-                  <a:schemeClr val="bg1">
-                    <a:lumMod val="85000"/>
-                  </a:schemeClr>
-                </a:solidFill>
-                <a:latin typeface="Arial Rounded MT Bold" panose="020F0704030504030204" pitchFamily="34" charset="0"/>
-              </a:rPr>
-              <a:t>Bin</a:t>
-            </a:r>
-            <a:r>
-              <a:rPr lang="fr-CA" sz="19900" i="1" kern="0" spc="-700" dirty="0">
-                <a:latin typeface="Arial Rounded MT Bold" panose="020F0704030504030204" pitchFamily="34" charset="0"/>
-              </a:rPr>
-              <a:t>.</a:t>
-            </a:r>
+              <a:t>endorphine.</a:t>
+            </a:r>
+            <a:endParaRPr lang="fr-CA" sz="12400" i="1" kern="0" spc="-700" dirty="0">
+              <a:latin typeface="Arial Rounded MT Bold" panose="020F0704030504030204" pitchFamily="34" charset="0"/>
+            </a:endParaRPr>
           </a:p>
         </p:txBody>
       </p:sp>
@@ -3503,8 +3541,8 @@
         </p:nvSpPr>
         <p:spPr>
           <a:xfrm>
-            <a:off x="3448050" y="3625190"/>
-            <a:ext cx="8743950" cy="3232810"/>
+            <a:off x="3962399" y="3743232"/>
+            <a:ext cx="4114801" cy="1571718"/>
           </a:xfrm>
         </p:spPr>
         <p:txBody>
@@ -3662,11 +3700,11 @@
           <p:nvPr/>
         </p:nvPicPr>
         <p:blipFill rotWithShape="1">
-          <a:blip r:embed="rId5">
+          <a:blip r:embed="rId6">
             <a:extLst>
               <a:ext uri="{BEBA8EAE-BF5A-486C-A8C5-ECC9F3942E4B}">
                 <a14:imgProps xmlns:a14="http://schemas.microsoft.com/office/drawing/2010/main">
-                  <a14:imgLayer r:embed="rId6">
+                  <a14:imgLayer r:embed="rId7">
                     <a14:imgEffect>
                       <a14:artisticBlur radius="16"/>
                     </a14:imgEffect>
@@ -3718,12 +3756,12 @@
           <p:nvPr/>
         </p:nvPicPr>
         <p:blipFill rotWithShape="1">
-          <a:blip r:embed="rId7">
+          <a:blip r:embed="rId8">
             <a:lum bright="70000" contrast="-70000"/>
             <a:extLst>
               <a:ext uri="{BEBA8EAE-BF5A-486C-A8C5-ECC9F3942E4B}">
                 <a14:imgProps xmlns:a14="http://schemas.microsoft.com/office/drawing/2010/main">
-                  <a14:imgLayer r:embed="rId6">
+                  <a14:imgLayer r:embed="rId7">
                     <a14:imgEffect>
                       <a14:artisticBlur radius="5"/>
                     </a14:imgEffect>
@@ -3790,6 +3828,62 @@
           <a:chExt cx="0" cy="0"/>
         </a:xfrm>
       </p:grpSpPr>
+      <p:pic>
+        <p:nvPicPr>
+          <p:cNvPr id="5" name="Picture 6" descr="Gradient Background Photos, Download The BEST Free Gradient Background  Stock Photos &amp; HD Images">
+            <a:extLst>
+              <a:ext uri="{FF2B5EF4-FFF2-40B4-BE49-F238E27FC236}">
+                <a16:creationId xmlns:a16="http://schemas.microsoft.com/office/drawing/2014/main" id="{C82EC3FF-DD3F-B0AC-7C96-B4C0755C4F3D}"/>
+              </a:ext>
+            </a:extLst>
+          </p:cNvPr>
+          <p:cNvPicPr>
+            <a:picLocks noChangeAspect="1" noChangeArrowheads="1"/>
+          </p:cNvPicPr>
+          <p:nvPr/>
+        </p:nvPicPr>
+        <p:blipFill>
+          <a:blip r:embed="rId2">
+            <a:extLst>
+              <a:ext uri="{BEBA8EAE-BF5A-486C-A8C5-ECC9F3942E4B}">
+                <a14:imgProps xmlns:a14="http://schemas.microsoft.com/office/drawing/2010/main">
+                  <a14:imgLayer r:embed="rId3">
+                    <a14:imgEffect>
+                      <a14:brightnessContrast bright="-20000"/>
+                    </a14:imgEffect>
+                  </a14:imgLayer>
+                </a14:imgProps>
+              </a:ext>
+              <a:ext uri="{28A0092B-C50C-407E-A947-70E740481C1C}">
+                <a14:useLocalDpi xmlns:a14="http://schemas.microsoft.com/office/drawing/2010/main" val="0"/>
+              </a:ext>
+            </a:extLst>
+          </a:blip>
+          <a:srcRect/>
+          <a:stretch>
+            <a:fillRect/>
+          </a:stretch>
+        </p:blipFill>
+        <p:spPr bwMode="auto">
+          <a:xfrm>
+            <a:off x="0" y="0"/>
+            <a:ext cx="12192000" cy="6858000"/>
+          </a:xfrm>
+          <a:prstGeom prst="rect">
+            <a:avLst/>
+          </a:prstGeom>
+          <a:noFill/>
+          <a:extLst>
+            <a:ext uri="{909E8E84-426E-40DD-AFC4-6F175D3DCCD1}">
+              <a14:hiddenFill xmlns:a14="http://schemas.microsoft.com/office/drawing/2010/main">
+                <a:solidFill>
+                  <a:srgbClr val="FFFFFF"/>
+                </a:solidFill>
+              </a14:hiddenFill>
+            </a:ext>
+          </a:extLst>
+        </p:spPr>
+      </p:pic>
       <p:sp>
         <p:nvSpPr>
           <p:cNvPr id="2" name="Titre 1">
@@ -3808,10 +3902,18 @@
         </p:nvSpPr>
         <p:spPr/>
         <p:txBody>
-          <a:bodyPr/>
-          <a:lstStyle/>
-          <a:p>
-            <a:endParaRPr lang="fr-CA"/>
+          <a:bodyPr>
+            <a:normAutofit fontScale="90000"/>
+          </a:bodyPr>
+          <a:lstStyle/>
+          <a:p>
+            <a:r>
+              <a:rPr lang="fr-CA" sz="9600" i="1" kern="0" spc="-700" dirty="0">
+                <a:latin typeface="Arial Rounded MT Bold" panose="020F0704030504030204" pitchFamily="34" charset="0"/>
+              </a:rPr>
+              <a:t>L’équipe :</a:t>
+            </a:r>
+            <a:endParaRPr lang="fr-CA" dirty="0"/>
           </a:p>
         </p:txBody>
       </p:sp>
@@ -3831,19 +3933,1002 @@
             <p:ph idx="1"/>
           </p:nvPr>
         </p:nvSpPr>
-        <p:spPr/>
-        <p:txBody>
-          <a:bodyPr/>
-          <a:lstStyle/>
-          <a:p>
-            <a:endParaRPr lang="fr-CA"/>
-          </a:p>
-        </p:txBody>
-      </p:sp>
+        <p:spPr>
+          <a:xfrm>
+            <a:off x="838200" y="1825625"/>
+            <a:ext cx="3011424" cy="551815"/>
+          </a:xfrm>
+        </p:spPr>
+        <p:txBody>
+          <a:bodyPr/>
+          <a:lstStyle/>
+          <a:p>
+            <a:r>
+              <a:rPr lang="fr-CA" i="1" dirty="0">
+                <a:latin typeface="Arial Rounded MT Bold" panose="020F0704030504030204" pitchFamily="34" charset="0"/>
+              </a:rPr>
+              <a:t>Abdel &amp; Zied :</a:t>
+            </a:r>
+          </a:p>
+        </p:txBody>
+      </p:sp>
+      <p:pic>
+        <p:nvPicPr>
+          <p:cNvPr id="1026" name="Picture 2" descr="Technology Icon Graphic by rangervector · Creative Fabrica">
+            <a:extLst>
+              <a:ext uri="{FF2B5EF4-FFF2-40B4-BE49-F238E27FC236}">
+                <a16:creationId xmlns:a16="http://schemas.microsoft.com/office/drawing/2014/main" id="{6811220F-6ABA-8EBC-E938-E11F04BC6BA4}"/>
+              </a:ext>
+            </a:extLst>
+          </p:cNvPr>
+          <p:cNvPicPr>
+            <a:picLocks noChangeAspect="1" noChangeArrowheads="1"/>
+          </p:cNvPicPr>
+          <p:nvPr/>
+        </p:nvPicPr>
+        <p:blipFill rotWithShape="1">
+          <a:blip r:embed="rId4">
+            <a:extLst>
+              <a:ext uri="{28A0092B-C50C-407E-A947-70E740481C1C}">
+                <a14:useLocalDpi xmlns:a14="http://schemas.microsoft.com/office/drawing/2010/main" val="0"/>
+              </a:ext>
+            </a:extLst>
+          </a:blip>
+          <a:srcRect l="32585" t="17724" r="32137" b="21211"/>
+          <a:stretch>
+            <a:fillRect/>
+          </a:stretch>
+        </p:blipFill>
+        <p:spPr bwMode="auto">
+          <a:xfrm rot="10800000">
+            <a:off x="8562975" y="-403225"/>
+            <a:ext cx="3629025" cy="4187826"/>
+          </a:xfrm>
+          <a:prstGeom prst="rect">
+            <a:avLst/>
+          </a:prstGeom>
+          <a:noFill/>
+          <a:extLst>
+            <a:ext uri="{909E8E84-426E-40DD-AFC4-6F175D3DCCD1}">
+              <a14:hiddenFill xmlns:a14="http://schemas.microsoft.com/office/drawing/2010/main">
+                <a:solidFill>
+                  <a:srgbClr val="FFFFFF"/>
+                </a:solidFill>
+              </a14:hiddenFill>
+            </a:ext>
+          </a:extLst>
+        </p:spPr>
+      </p:pic>
+      <p:pic>
+        <p:nvPicPr>
+          <p:cNvPr id="1028" name="Picture 4" descr="Sport basketball football balls - Free Icon PNG, SVG">
+            <a:extLst>
+              <a:ext uri="{FF2B5EF4-FFF2-40B4-BE49-F238E27FC236}">
+                <a16:creationId xmlns:a16="http://schemas.microsoft.com/office/drawing/2014/main" id="{EC5398AB-F7B0-C9E3-1798-60F70D32D50E}"/>
+              </a:ext>
+            </a:extLst>
+          </p:cNvPr>
+          <p:cNvPicPr>
+            <a:picLocks noChangeAspect="1" noChangeArrowheads="1"/>
+          </p:cNvPicPr>
+          <p:nvPr/>
+        </p:nvPicPr>
+        <p:blipFill>
+          <a:blip r:embed="rId5">
+            <a:extLst>
+              <a:ext uri="{28A0092B-C50C-407E-A947-70E740481C1C}">
+                <a14:useLocalDpi xmlns:a14="http://schemas.microsoft.com/office/drawing/2010/main" val="0"/>
+              </a:ext>
+            </a:extLst>
+          </a:blip>
+          <a:srcRect/>
+          <a:stretch>
+            <a:fillRect/>
+          </a:stretch>
+        </p:blipFill>
+        <p:spPr bwMode="auto">
+          <a:xfrm>
+            <a:off x="6124575" y="899160"/>
+            <a:ext cx="4876800" cy="4876800"/>
+          </a:xfrm>
+          <a:prstGeom prst="rect">
+            <a:avLst/>
+          </a:prstGeom>
+          <a:noFill/>
+          <a:extLst>
+            <a:ext uri="{909E8E84-426E-40DD-AFC4-6F175D3DCCD1}">
+              <a14:hiddenFill xmlns:a14="http://schemas.microsoft.com/office/drawing/2010/main">
+                <a:solidFill>
+                  <a:srgbClr val="FFFFFF"/>
+                </a:solidFill>
+              </a14:hiddenFill>
+            </a:ext>
+          </a:extLst>
+        </p:spPr>
+      </p:pic>
+      <p:sp>
+        <p:nvSpPr>
+          <p:cNvPr id="7" name="ZoneTexte 6">
+            <a:extLst>
+              <a:ext uri="{FF2B5EF4-FFF2-40B4-BE49-F238E27FC236}">
+                <a16:creationId xmlns:a16="http://schemas.microsoft.com/office/drawing/2014/main" id="{B176F910-39BF-30F7-9A45-184370896449}"/>
+              </a:ext>
+            </a:extLst>
+          </p:cNvPr>
+          <p:cNvSpPr txBox="1"/>
+          <p:nvPr/>
+        </p:nvSpPr>
+        <p:spPr>
+          <a:xfrm>
+            <a:off x="5894832" y="3300984"/>
+            <a:ext cx="1795272" cy="707886"/>
+          </a:xfrm>
+          <a:prstGeom prst="rect">
+            <a:avLst/>
+          </a:prstGeom>
+          <a:noFill/>
+        </p:spPr>
+        <p:txBody>
+          <a:bodyPr wrap="square" rtlCol="0">
+            <a:spAutoFit/>
+          </a:bodyPr>
+          <a:lstStyle/>
+          <a:p>
+            <a:r>
+              <a:rPr lang="fr-CA" sz="4000" i="1" dirty="0">
+                <a:latin typeface="Arial Rounded MT Bold" panose="020F0704030504030204" pitchFamily="34" charset="0"/>
+              </a:rPr>
+              <a:t>Sport.</a:t>
+            </a:r>
+            <a:endParaRPr lang="fr-CA" dirty="0"/>
+          </a:p>
+        </p:txBody>
+      </p:sp>
+      <p:sp>
+        <p:nvSpPr>
+          <p:cNvPr id="8" name="ZoneTexte 7">
+            <a:extLst>
+              <a:ext uri="{FF2B5EF4-FFF2-40B4-BE49-F238E27FC236}">
+                <a16:creationId xmlns:a16="http://schemas.microsoft.com/office/drawing/2014/main" id="{C4A4888F-C017-6275-650D-18EE591862B9}"/>
+              </a:ext>
+            </a:extLst>
+          </p:cNvPr>
+          <p:cNvSpPr txBox="1"/>
+          <p:nvPr/>
+        </p:nvSpPr>
+        <p:spPr>
+          <a:xfrm>
+            <a:off x="4143947" y="3878428"/>
+            <a:ext cx="3546157" cy="707886"/>
+          </a:xfrm>
+          <a:prstGeom prst="rect">
+            <a:avLst/>
+          </a:prstGeom>
+          <a:noFill/>
+        </p:spPr>
+        <p:txBody>
+          <a:bodyPr wrap="square" rtlCol="0">
+            <a:spAutoFit/>
+          </a:bodyPr>
+          <a:lstStyle/>
+          <a:p>
+            <a:r>
+              <a:rPr lang="fr-CA" sz="4000" i="1" dirty="0">
+                <a:latin typeface="Arial Rounded MT Bold" panose="020F0704030504030204" pitchFamily="34" charset="0"/>
+              </a:rPr>
+              <a:t>Informatique.</a:t>
+            </a:r>
+            <a:endParaRPr lang="fr-CA" dirty="0"/>
+          </a:p>
+        </p:txBody>
+      </p:sp>
+      <p:sp>
+        <p:nvSpPr>
+          <p:cNvPr id="9" name="ZoneTexte 8">
+            <a:extLst>
+              <a:ext uri="{FF2B5EF4-FFF2-40B4-BE49-F238E27FC236}">
+                <a16:creationId xmlns:a16="http://schemas.microsoft.com/office/drawing/2014/main" id="{836F66FE-17FC-1BF9-8C04-A961B8E997D6}"/>
+              </a:ext>
+            </a:extLst>
+          </p:cNvPr>
+          <p:cNvSpPr txBox="1"/>
+          <p:nvPr/>
+        </p:nvSpPr>
+        <p:spPr>
+          <a:xfrm>
+            <a:off x="3443859" y="4379672"/>
+            <a:ext cx="4087368" cy="1323439"/>
+          </a:xfrm>
+          <a:prstGeom prst="rect">
+            <a:avLst/>
+          </a:prstGeom>
+          <a:noFill/>
+        </p:spPr>
+        <p:txBody>
+          <a:bodyPr wrap="square" rtlCol="0">
+            <a:spAutoFit/>
+          </a:bodyPr>
+          <a:lstStyle/>
+          <a:p>
+            <a:pPr algn="r"/>
+            <a:r>
+              <a:rPr lang="fr-CA" sz="4000" i="1" dirty="0">
+                <a:latin typeface="Arial Rounded MT Bold" panose="020F0704030504030204" pitchFamily="34" charset="0"/>
+              </a:rPr>
+              <a:t>Développement web.</a:t>
+            </a:r>
+            <a:endParaRPr lang="fr-CA" dirty="0"/>
+          </a:p>
+        </p:txBody>
+      </p:sp>
+      <p:pic>
+        <p:nvPicPr>
+          <p:cNvPr id="1030" name="Picture 6" descr="Ever wonder why your mouse cursor is slanted? | by ajiitha | Prototypr">
+            <a:extLst>
+              <a:ext uri="{FF2B5EF4-FFF2-40B4-BE49-F238E27FC236}">
+                <a16:creationId xmlns:a16="http://schemas.microsoft.com/office/drawing/2014/main" id="{CDDF7D96-951F-8908-840B-0FEC25F94648}"/>
+              </a:ext>
+            </a:extLst>
+          </p:cNvPr>
+          <p:cNvPicPr>
+            <a:picLocks noChangeAspect="1" noChangeArrowheads="1"/>
+          </p:cNvPicPr>
+          <p:nvPr/>
+        </p:nvPicPr>
+        <p:blipFill>
+          <a:blip r:embed="rId6">
+            <a:duotone>
+              <a:prstClr val="black"/>
+              <a:schemeClr val="tx2">
+                <a:tint val="45000"/>
+                <a:satMod val="400000"/>
+              </a:schemeClr>
+            </a:duotone>
+            <a:extLst>
+              <a:ext uri="{28A0092B-C50C-407E-A947-70E740481C1C}">
+                <a14:useLocalDpi xmlns:a14="http://schemas.microsoft.com/office/drawing/2010/main" val="0"/>
+              </a:ext>
+            </a:extLst>
+          </a:blip>
+          <a:srcRect/>
+          <a:stretch>
+            <a:fillRect/>
+          </a:stretch>
+        </p:blipFill>
+        <p:spPr bwMode="auto">
+          <a:xfrm>
+            <a:off x="9499079" y="3991954"/>
+            <a:ext cx="1732039" cy="2474341"/>
+          </a:xfrm>
+          <a:prstGeom prst="rect">
+            <a:avLst/>
+          </a:prstGeom>
+          <a:noFill/>
+          <a:extLst>
+            <a:ext uri="{909E8E84-426E-40DD-AFC4-6F175D3DCCD1}">
+              <a14:hiddenFill xmlns:a14="http://schemas.microsoft.com/office/drawing/2010/main">
+                <a:solidFill>
+                  <a:srgbClr val="FFFFFF"/>
+                </a:solidFill>
+              </a14:hiddenFill>
+            </a:ext>
+          </a:extLst>
+        </p:spPr>
+      </p:pic>
     </p:spTree>
     <p:extLst>
       <p:ext uri="{BB962C8B-B14F-4D97-AF65-F5344CB8AC3E}">
         <p14:creationId xmlns:p14="http://schemas.microsoft.com/office/powerpoint/2010/main" val="153789946"/>
+      </p:ext>
+    </p:extLst>
+  </p:cSld>
+  <p:clrMapOvr>
+    <a:masterClrMapping/>
+  </p:clrMapOvr>
+</p:sld>
+</file>
+
+<file path=ppt/slides/slide3.xml><?xml version="1.0" encoding="utf-8"?>
+<p:sld xmlns:a="http://schemas.openxmlformats.org/drawingml/2006/main" xmlns:r="http://schemas.openxmlformats.org/officeDocument/2006/relationships" xmlns:p="http://schemas.openxmlformats.org/presentationml/2006/main">
+  <p:cSld>
+    <p:spTree>
+      <p:nvGrpSpPr>
+        <p:cNvPr id="1" name="">
+          <a:extLst>
+            <a:ext uri="{FF2B5EF4-FFF2-40B4-BE49-F238E27FC236}">
+              <a16:creationId xmlns:a16="http://schemas.microsoft.com/office/drawing/2014/main" id="{E52E2B3F-A5C4-2CE6-2B54-6792AEF9A53C}"/>
+            </a:ext>
+          </a:extLst>
+        </p:cNvPr>
+        <p:cNvGrpSpPr/>
+        <p:nvPr/>
+      </p:nvGrpSpPr>
+      <p:grpSpPr>
+        <a:xfrm>
+          <a:off x="0" y="0"/>
+          <a:ext cx="0" cy="0"/>
+          <a:chOff x="0" y="0"/>
+          <a:chExt cx="0" cy="0"/>
+        </a:xfrm>
+      </p:grpSpPr>
+      <p:pic>
+        <p:nvPicPr>
+          <p:cNvPr id="5" name="Picture 6" descr="Gradient Background Photos, Download The BEST Free Gradient Background  Stock Photos &amp; HD Images">
+            <a:extLst>
+              <a:ext uri="{FF2B5EF4-FFF2-40B4-BE49-F238E27FC236}">
+                <a16:creationId xmlns:a16="http://schemas.microsoft.com/office/drawing/2014/main" id="{76B0A851-90D4-775B-085F-4BEBB76AB65B}"/>
+              </a:ext>
+            </a:extLst>
+          </p:cNvPr>
+          <p:cNvPicPr>
+            <a:picLocks noChangeAspect="1" noChangeArrowheads="1"/>
+          </p:cNvPicPr>
+          <p:nvPr/>
+        </p:nvPicPr>
+        <p:blipFill>
+          <a:blip r:embed="rId2">
+            <a:extLst>
+              <a:ext uri="{BEBA8EAE-BF5A-486C-A8C5-ECC9F3942E4B}">
+                <a14:imgProps xmlns:a14="http://schemas.microsoft.com/office/drawing/2010/main">
+                  <a14:imgLayer r:embed="rId3">
+                    <a14:imgEffect>
+                      <a14:brightnessContrast bright="-20000"/>
+                    </a14:imgEffect>
+                  </a14:imgLayer>
+                </a14:imgProps>
+              </a:ext>
+              <a:ext uri="{28A0092B-C50C-407E-A947-70E740481C1C}">
+                <a14:useLocalDpi xmlns:a14="http://schemas.microsoft.com/office/drawing/2010/main" val="0"/>
+              </a:ext>
+            </a:extLst>
+          </a:blip>
+          <a:srcRect/>
+          <a:stretch>
+            <a:fillRect/>
+          </a:stretch>
+        </p:blipFill>
+        <p:spPr bwMode="auto">
+          <a:xfrm>
+            <a:off x="0" y="0"/>
+            <a:ext cx="12192000" cy="6858000"/>
+          </a:xfrm>
+          <a:prstGeom prst="rect">
+            <a:avLst/>
+          </a:prstGeom>
+          <a:noFill/>
+          <a:extLst>
+            <a:ext uri="{909E8E84-426E-40DD-AFC4-6F175D3DCCD1}">
+              <a14:hiddenFill xmlns:a14="http://schemas.microsoft.com/office/drawing/2010/main">
+                <a:solidFill>
+                  <a:srgbClr val="FFFFFF"/>
+                </a:solidFill>
+              </a14:hiddenFill>
+            </a:ext>
+          </a:extLst>
+        </p:spPr>
+      </p:pic>
+      <p:sp>
+        <p:nvSpPr>
+          <p:cNvPr id="2" name="Titre 1">
+            <a:extLst>
+              <a:ext uri="{FF2B5EF4-FFF2-40B4-BE49-F238E27FC236}">
+                <a16:creationId xmlns:a16="http://schemas.microsoft.com/office/drawing/2014/main" id="{D6BD73EC-3784-9305-95F3-56295BFE6C58}"/>
+              </a:ext>
+            </a:extLst>
+          </p:cNvPr>
+          <p:cNvSpPr>
+            <a:spLocks noGrp="1"/>
+          </p:cNvSpPr>
+          <p:nvPr>
+            <p:ph type="title"/>
+          </p:nvPr>
+        </p:nvSpPr>
+        <p:spPr/>
+        <p:txBody>
+          <a:bodyPr/>
+          <a:lstStyle/>
+          <a:p>
+            <a:endParaRPr lang="fr-CA"/>
+          </a:p>
+        </p:txBody>
+      </p:sp>
+      <p:sp>
+        <p:nvSpPr>
+          <p:cNvPr id="3" name="Espace réservé du contenu 2">
+            <a:extLst>
+              <a:ext uri="{FF2B5EF4-FFF2-40B4-BE49-F238E27FC236}">
+                <a16:creationId xmlns:a16="http://schemas.microsoft.com/office/drawing/2014/main" id="{88CE915D-D098-A6E1-7C8D-AF224587AF87}"/>
+              </a:ext>
+            </a:extLst>
+          </p:cNvPr>
+          <p:cNvSpPr>
+            <a:spLocks noGrp="1"/>
+          </p:cNvSpPr>
+          <p:nvPr>
+            <p:ph idx="1"/>
+          </p:nvPr>
+        </p:nvSpPr>
+        <p:spPr/>
+        <p:txBody>
+          <a:bodyPr/>
+          <a:lstStyle/>
+          <a:p>
+            <a:endParaRPr lang="fr-CA"/>
+          </a:p>
+        </p:txBody>
+      </p:sp>
+    </p:spTree>
+    <p:extLst>
+      <p:ext uri="{BB962C8B-B14F-4D97-AF65-F5344CB8AC3E}">
+        <p14:creationId xmlns:p14="http://schemas.microsoft.com/office/powerpoint/2010/main" val="3656693572"/>
+      </p:ext>
+    </p:extLst>
+  </p:cSld>
+  <p:clrMapOvr>
+    <a:masterClrMapping/>
+  </p:clrMapOvr>
+</p:sld>
+</file>
+
+<file path=ppt/slides/slide4.xml><?xml version="1.0" encoding="utf-8"?>
+<p:sld xmlns:a="http://schemas.openxmlformats.org/drawingml/2006/main" xmlns:r="http://schemas.openxmlformats.org/officeDocument/2006/relationships" xmlns:p="http://schemas.openxmlformats.org/presentationml/2006/main">
+  <p:cSld>
+    <p:spTree>
+      <p:nvGrpSpPr>
+        <p:cNvPr id="1" name="">
+          <a:extLst>
+            <a:ext uri="{FF2B5EF4-FFF2-40B4-BE49-F238E27FC236}">
+              <a16:creationId xmlns:a16="http://schemas.microsoft.com/office/drawing/2014/main" id="{660AAF65-5BB5-E8E2-3C65-433AD9B1D0F4}"/>
+            </a:ext>
+          </a:extLst>
+        </p:cNvPr>
+        <p:cNvGrpSpPr/>
+        <p:nvPr/>
+      </p:nvGrpSpPr>
+      <p:grpSpPr>
+        <a:xfrm>
+          <a:off x="0" y="0"/>
+          <a:ext cx="0" cy="0"/>
+          <a:chOff x="0" y="0"/>
+          <a:chExt cx="0" cy="0"/>
+        </a:xfrm>
+      </p:grpSpPr>
+      <p:pic>
+        <p:nvPicPr>
+          <p:cNvPr id="5" name="Picture 6" descr="Gradient Background Photos, Download The BEST Free Gradient Background  Stock Photos &amp; HD Images">
+            <a:extLst>
+              <a:ext uri="{FF2B5EF4-FFF2-40B4-BE49-F238E27FC236}">
+                <a16:creationId xmlns:a16="http://schemas.microsoft.com/office/drawing/2014/main" id="{FF01CD2A-A0E2-7CAE-751E-652FB5893D4B}"/>
+              </a:ext>
+            </a:extLst>
+          </p:cNvPr>
+          <p:cNvPicPr>
+            <a:picLocks noChangeAspect="1" noChangeArrowheads="1"/>
+          </p:cNvPicPr>
+          <p:nvPr/>
+        </p:nvPicPr>
+        <p:blipFill>
+          <a:blip r:embed="rId2">
+            <a:extLst>
+              <a:ext uri="{BEBA8EAE-BF5A-486C-A8C5-ECC9F3942E4B}">
+                <a14:imgProps xmlns:a14="http://schemas.microsoft.com/office/drawing/2010/main">
+                  <a14:imgLayer r:embed="rId3">
+                    <a14:imgEffect>
+                      <a14:brightnessContrast bright="-20000"/>
+                    </a14:imgEffect>
+                  </a14:imgLayer>
+                </a14:imgProps>
+              </a:ext>
+              <a:ext uri="{28A0092B-C50C-407E-A947-70E740481C1C}">
+                <a14:useLocalDpi xmlns:a14="http://schemas.microsoft.com/office/drawing/2010/main" val="0"/>
+              </a:ext>
+            </a:extLst>
+          </a:blip>
+          <a:srcRect/>
+          <a:stretch>
+            <a:fillRect/>
+          </a:stretch>
+        </p:blipFill>
+        <p:spPr bwMode="auto">
+          <a:xfrm>
+            <a:off x="0" y="0"/>
+            <a:ext cx="12192000" cy="6858000"/>
+          </a:xfrm>
+          <a:prstGeom prst="rect">
+            <a:avLst/>
+          </a:prstGeom>
+          <a:noFill/>
+          <a:extLst>
+            <a:ext uri="{909E8E84-426E-40DD-AFC4-6F175D3DCCD1}">
+              <a14:hiddenFill xmlns:a14="http://schemas.microsoft.com/office/drawing/2010/main">
+                <a:solidFill>
+                  <a:srgbClr val="FFFFFF"/>
+                </a:solidFill>
+              </a14:hiddenFill>
+            </a:ext>
+          </a:extLst>
+        </p:spPr>
+      </p:pic>
+      <p:sp>
+        <p:nvSpPr>
+          <p:cNvPr id="2" name="Titre 1">
+            <a:extLst>
+              <a:ext uri="{FF2B5EF4-FFF2-40B4-BE49-F238E27FC236}">
+                <a16:creationId xmlns:a16="http://schemas.microsoft.com/office/drawing/2014/main" id="{F5295B83-7C6F-F811-3AA8-CEC77480D2C3}"/>
+              </a:ext>
+            </a:extLst>
+          </p:cNvPr>
+          <p:cNvSpPr>
+            <a:spLocks noGrp="1"/>
+          </p:cNvSpPr>
+          <p:nvPr>
+            <p:ph type="title"/>
+          </p:nvPr>
+        </p:nvSpPr>
+        <p:spPr/>
+        <p:txBody>
+          <a:bodyPr/>
+          <a:lstStyle/>
+          <a:p>
+            <a:endParaRPr lang="fr-CA"/>
+          </a:p>
+        </p:txBody>
+      </p:sp>
+      <p:sp>
+        <p:nvSpPr>
+          <p:cNvPr id="3" name="Espace réservé du contenu 2">
+            <a:extLst>
+              <a:ext uri="{FF2B5EF4-FFF2-40B4-BE49-F238E27FC236}">
+                <a16:creationId xmlns:a16="http://schemas.microsoft.com/office/drawing/2014/main" id="{E05DAD70-CF3A-B3A3-A064-27601DC11898}"/>
+              </a:ext>
+            </a:extLst>
+          </p:cNvPr>
+          <p:cNvSpPr>
+            <a:spLocks noGrp="1"/>
+          </p:cNvSpPr>
+          <p:nvPr>
+            <p:ph idx="1"/>
+          </p:nvPr>
+        </p:nvSpPr>
+        <p:spPr/>
+        <p:txBody>
+          <a:bodyPr/>
+          <a:lstStyle/>
+          <a:p>
+            <a:endParaRPr lang="fr-CA"/>
+          </a:p>
+        </p:txBody>
+      </p:sp>
+    </p:spTree>
+    <p:extLst>
+      <p:ext uri="{BB962C8B-B14F-4D97-AF65-F5344CB8AC3E}">
+        <p14:creationId xmlns:p14="http://schemas.microsoft.com/office/powerpoint/2010/main" val="1653262805"/>
+      </p:ext>
+    </p:extLst>
+  </p:cSld>
+  <p:clrMapOvr>
+    <a:masterClrMapping/>
+  </p:clrMapOvr>
+</p:sld>
+</file>
+
+<file path=ppt/slides/slide5.xml><?xml version="1.0" encoding="utf-8"?>
+<p:sld xmlns:a="http://schemas.openxmlformats.org/drawingml/2006/main" xmlns:r="http://schemas.openxmlformats.org/officeDocument/2006/relationships" xmlns:p="http://schemas.openxmlformats.org/presentationml/2006/main">
+  <p:cSld>
+    <p:spTree>
+      <p:nvGrpSpPr>
+        <p:cNvPr id="1" name="">
+          <a:extLst>
+            <a:ext uri="{FF2B5EF4-FFF2-40B4-BE49-F238E27FC236}">
+              <a16:creationId xmlns:a16="http://schemas.microsoft.com/office/drawing/2014/main" id="{C5243B7A-DF86-85FC-203F-DB2918AAAD7C}"/>
+            </a:ext>
+          </a:extLst>
+        </p:cNvPr>
+        <p:cNvGrpSpPr/>
+        <p:nvPr/>
+      </p:nvGrpSpPr>
+      <p:grpSpPr>
+        <a:xfrm>
+          <a:off x="0" y="0"/>
+          <a:ext cx="0" cy="0"/>
+          <a:chOff x="0" y="0"/>
+          <a:chExt cx="0" cy="0"/>
+        </a:xfrm>
+      </p:grpSpPr>
+      <p:pic>
+        <p:nvPicPr>
+          <p:cNvPr id="5" name="Picture 6" descr="Gradient Background Photos, Download The BEST Free Gradient Background  Stock Photos &amp; HD Images">
+            <a:extLst>
+              <a:ext uri="{FF2B5EF4-FFF2-40B4-BE49-F238E27FC236}">
+                <a16:creationId xmlns:a16="http://schemas.microsoft.com/office/drawing/2014/main" id="{300DD3A5-6DAD-6F4A-0A47-E956E142FA85}"/>
+              </a:ext>
+            </a:extLst>
+          </p:cNvPr>
+          <p:cNvPicPr>
+            <a:picLocks noChangeAspect="1" noChangeArrowheads="1"/>
+          </p:cNvPicPr>
+          <p:nvPr/>
+        </p:nvPicPr>
+        <p:blipFill>
+          <a:blip r:embed="rId2">
+            <a:extLst>
+              <a:ext uri="{BEBA8EAE-BF5A-486C-A8C5-ECC9F3942E4B}">
+                <a14:imgProps xmlns:a14="http://schemas.microsoft.com/office/drawing/2010/main">
+                  <a14:imgLayer r:embed="rId3">
+                    <a14:imgEffect>
+                      <a14:brightnessContrast bright="-20000"/>
+                    </a14:imgEffect>
+                  </a14:imgLayer>
+                </a14:imgProps>
+              </a:ext>
+              <a:ext uri="{28A0092B-C50C-407E-A947-70E740481C1C}">
+                <a14:useLocalDpi xmlns:a14="http://schemas.microsoft.com/office/drawing/2010/main" val="0"/>
+              </a:ext>
+            </a:extLst>
+          </a:blip>
+          <a:srcRect/>
+          <a:stretch>
+            <a:fillRect/>
+          </a:stretch>
+        </p:blipFill>
+        <p:spPr bwMode="auto">
+          <a:xfrm>
+            <a:off x="0" y="0"/>
+            <a:ext cx="12192000" cy="6858000"/>
+          </a:xfrm>
+          <a:prstGeom prst="rect">
+            <a:avLst/>
+          </a:prstGeom>
+          <a:noFill/>
+          <a:extLst>
+            <a:ext uri="{909E8E84-426E-40DD-AFC4-6F175D3DCCD1}">
+              <a14:hiddenFill xmlns:a14="http://schemas.microsoft.com/office/drawing/2010/main">
+                <a:solidFill>
+                  <a:srgbClr val="FFFFFF"/>
+                </a:solidFill>
+              </a14:hiddenFill>
+            </a:ext>
+          </a:extLst>
+        </p:spPr>
+      </p:pic>
+      <p:sp>
+        <p:nvSpPr>
+          <p:cNvPr id="2" name="Titre 1">
+            <a:extLst>
+              <a:ext uri="{FF2B5EF4-FFF2-40B4-BE49-F238E27FC236}">
+                <a16:creationId xmlns:a16="http://schemas.microsoft.com/office/drawing/2014/main" id="{65843D02-CB07-7A16-EAFD-D0549A06A75F}"/>
+              </a:ext>
+            </a:extLst>
+          </p:cNvPr>
+          <p:cNvSpPr>
+            <a:spLocks noGrp="1"/>
+          </p:cNvSpPr>
+          <p:nvPr>
+            <p:ph type="title"/>
+          </p:nvPr>
+        </p:nvSpPr>
+        <p:spPr/>
+        <p:txBody>
+          <a:bodyPr/>
+          <a:lstStyle/>
+          <a:p>
+            <a:endParaRPr lang="fr-CA"/>
+          </a:p>
+        </p:txBody>
+      </p:sp>
+      <p:sp>
+        <p:nvSpPr>
+          <p:cNvPr id="3" name="Espace réservé du contenu 2">
+            <a:extLst>
+              <a:ext uri="{FF2B5EF4-FFF2-40B4-BE49-F238E27FC236}">
+                <a16:creationId xmlns:a16="http://schemas.microsoft.com/office/drawing/2014/main" id="{72A4F703-E1F7-B8F3-D84D-3FD2F4BD6ECA}"/>
+              </a:ext>
+            </a:extLst>
+          </p:cNvPr>
+          <p:cNvSpPr>
+            <a:spLocks noGrp="1"/>
+          </p:cNvSpPr>
+          <p:nvPr>
+            <p:ph idx="1"/>
+          </p:nvPr>
+        </p:nvSpPr>
+        <p:spPr/>
+        <p:txBody>
+          <a:bodyPr/>
+          <a:lstStyle/>
+          <a:p>
+            <a:endParaRPr lang="fr-CA"/>
+          </a:p>
+        </p:txBody>
+      </p:sp>
+    </p:spTree>
+    <p:extLst>
+      <p:ext uri="{BB962C8B-B14F-4D97-AF65-F5344CB8AC3E}">
+        <p14:creationId xmlns:p14="http://schemas.microsoft.com/office/powerpoint/2010/main" val="4170876213"/>
+      </p:ext>
+    </p:extLst>
+  </p:cSld>
+  <p:clrMapOvr>
+    <a:masterClrMapping/>
+  </p:clrMapOvr>
+</p:sld>
+</file>
+
+<file path=ppt/slides/slide6.xml><?xml version="1.0" encoding="utf-8"?>
+<p:sld xmlns:a="http://schemas.openxmlformats.org/drawingml/2006/main" xmlns:r="http://schemas.openxmlformats.org/officeDocument/2006/relationships" xmlns:p="http://schemas.openxmlformats.org/presentationml/2006/main">
+  <p:cSld>
+    <p:spTree>
+      <p:nvGrpSpPr>
+        <p:cNvPr id="1" name="">
+          <a:extLst>
+            <a:ext uri="{FF2B5EF4-FFF2-40B4-BE49-F238E27FC236}">
+              <a16:creationId xmlns:a16="http://schemas.microsoft.com/office/drawing/2014/main" id="{3B5C2354-239F-E6F3-80C8-26FA3B226602}"/>
+            </a:ext>
+          </a:extLst>
+        </p:cNvPr>
+        <p:cNvGrpSpPr/>
+        <p:nvPr/>
+      </p:nvGrpSpPr>
+      <p:grpSpPr>
+        <a:xfrm>
+          <a:off x="0" y="0"/>
+          <a:ext cx="0" cy="0"/>
+          <a:chOff x="0" y="0"/>
+          <a:chExt cx="0" cy="0"/>
+        </a:xfrm>
+      </p:grpSpPr>
+      <p:pic>
+        <p:nvPicPr>
+          <p:cNvPr id="5" name="Picture 6" descr="Gradient Background Photos, Download The BEST Free Gradient Background  Stock Photos &amp; HD Images">
+            <a:extLst>
+              <a:ext uri="{FF2B5EF4-FFF2-40B4-BE49-F238E27FC236}">
+                <a16:creationId xmlns:a16="http://schemas.microsoft.com/office/drawing/2014/main" id="{16B47ECC-4A95-7F41-B54C-F1E910094F73}"/>
+              </a:ext>
+            </a:extLst>
+          </p:cNvPr>
+          <p:cNvPicPr>
+            <a:picLocks noChangeAspect="1" noChangeArrowheads="1"/>
+          </p:cNvPicPr>
+          <p:nvPr/>
+        </p:nvPicPr>
+        <p:blipFill>
+          <a:blip r:embed="rId2">
+            <a:extLst>
+              <a:ext uri="{BEBA8EAE-BF5A-486C-A8C5-ECC9F3942E4B}">
+                <a14:imgProps xmlns:a14="http://schemas.microsoft.com/office/drawing/2010/main">
+                  <a14:imgLayer r:embed="rId3">
+                    <a14:imgEffect>
+                      <a14:brightnessContrast bright="-20000"/>
+                    </a14:imgEffect>
+                  </a14:imgLayer>
+                </a14:imgProps>
+              </a:ext>
+              <a:ext uri="{28A0092B-C50C-407E-A947-70E740481C1C}">
+                <a14:useLocalDpi xmlns:a14="http://schemas.microsoft.com/office/drawing/2010/main" val="0"/>
+              </a:ext>
+            </a:extLst>
+          </a:blip>
+          <a:srcRect/>
+          <a:stretch>
+            <a:fillRect/>
+          </a:stretch>
+        </p:blipFill>
+        <p:spPr bwMode="auto">
+          <a:xfrm>
+            <a:off x="0" y="0"/>
+            <a:ext cx="12192000" cy="6858000"/>
+          </a:xfrm>
+          <a:prstGeom prst="rect">
+            <a:avLst/>
+          </a:prstGeom>
+          <a:noFill/>
+          <a:extLst>
+            <a:ext uri="{909E8E84-426E-40DD-AFC4-6F175D3DCCD1}">
+              <a14:hiddenFill xmlns:a14="http://schemas.microsoft.com/office/drawing/2010/main">
+                <a:solidFill>
+                  <a:srgbClr val="FFFFFF"/>
+                </a:solidFill>
+              </a14:hiddenFill>
+            </a:ext>
+          </a:extLst>
+        </p:spPr>
+      </p:pic>
+      <p:sp>
+        <p:nvSpPr>
+          <p:cNvPr id="2" name="Titre 1">
+            <a:extLst>
+              <a:ext uri="{FF2B5EF4-FFF2-40B4-BE49-F238E27FC236}">
+                <a16:creationId xmlns:a16="http://schemas.microsoft.com/office/drawing/2014/main" id="{EAD20918-1AF5-3AD9-6210-30A9C4C5223E}"/>
+              </a:ext>
+            </a:extLst>
+          </p:cNvPr>
+          <p:cNvSpPr>
+            <a:spLocks noGrp="1"/>
+          </p:cNvSpPr>
+          <p:nvPr>
+            <p:ph type="title"/>
+          </p:nvPr>
+        </p:nvSpPr>
+        <p:spPr/>
+        <p:txBody>
+          <a:bodyPr/>
+          <a:lstStyle/>
+          <a:p>
+            <a:endParaRPr lang="fr-CA"/>
+          </a:p>
+        </p:txBody>
+      </p:sp>
+      <p:sp>
+        <p:nvSpPr>
+          <p:cNvPr id="3" name="Espace réservé du contenu 2">
+            <a:extLst>
+              <a:ext uri="{FF2B5EF4-FFF2-40B4-BE49-F238E27FC236}">
+                <a16:creationId xmlns:a16="http://schemas.microsoft.com/office/drawing/2014/main" id="{24EFEDEE-881C-496C-0354-0FAEC59ADF2F}"/>
+              </a:ext>
+            </a:extLst>
+          </p:cNvPr>
+          <p:cNvSpPr>
+            <a:spLocks noGrp="1"/>
+          </p:cNvSpPr>
+          <p:nvPr>
+            <p:ph idx="1"/>
+          </p:nvPr>
+        </p:nvSpPr>
+        <p:spPr/>
+        <p:txBody>
+          <a:bodyPr/>
+          <a:lstStyle/>
+          <a:p>
+            <a:endParaRPr lang="fr-CA"/>
+          </a:p>
+        </p:txBody>
+      </p:sp>
+    </p:spTree>
+    <p:extLst>
+      <p:ext uri="{BB962C8B-B14F-4D97-AF65-F5344CB8AC3E}">
+        <p14:creationId xmlns:p14="http://schemas.microsoft.com/office/powerpoint/2010/main" val="1423345779"/>
+      </p:ext>
+    </p:extLst>
+  </p:cSld>
+  <p:clrMapOvr>
+    <a:masterClrMapping/>
+  </p:clrMapOvr>
+</p:sld>
+</file>
+
+<file path=ppt/slides/slide7.xml><?xml version="1.0" encoding="utf-8"?>
+<p:sld xmlns:a="http://schemas.openxmlformats.org/drawingml/2006/main" xmlns:r="http://schemas.openxmlformats.org/officeDocument/2006/relationships" xmlns:p="http://schemas.openxmlformats.org/presentationml/2006/main">
+  <p:cSld>
+    <p:spTree>
+      <p:nvGrpSpPr>
+        <p:cNvPr id="1" name="">
+          <a:extLst>
+            <a:ext uri="{FF2B5EF4-FFF2-40B4-BE49-F238E27FC236}">
+              <a16:creationId xmlns:a16="http://schemas.microsoft.com/office/drawing/2014/main" id="{D9B8137B-8F14-B749-4784-5D9C1F9512CF}"/>
+            </a:ext>
+          </a:extLst>
+        </p:cNvPr>
+        <p:cNvGrpSpPr/>
+        <p:nvPr/>
+      </p:nvGrpSpPr>
+      <p:grpSpPr>
+        <a:xfrm>
+          <a:off x="0" y="0"/>
+          <a:ext cx="0" cy="0"/>
+          <a:chOff x="0" y="0"/>
+          <a:chExt cx="0" cy="0"/>
+        </a:xfrm>
+      </p:grpSpPr>
+      <p:pic>
+        <p:nvPicPr>
+          <p:cNvPr id="5" name="Picture 6" descr="Gradient Background Photos, Download The BEST Free Gradient Background  Stock Photos &amp; HD Images">
+            <a:extLst>
+              <a:ext uri="{FF2B5EF4-FFF2-40B4-BE49-F238E27FC236}">
+                <a16:creationId xmlns:a16="http://schemas.microsoft.com/office/drawing/2014/main" id="{F7A9D171-FD83-2574-E2C6-570501D8E1D5}"/>
+              </a:ext>
+            </a:extLst>
+          </p:cNvPr>
+          <p:cNvPicPr>
+            <a:picLocks noChangeAspect="1" noChangeArrowheads="1"/>
+          </p:cNvPicPr>
+          <p:nvPr/>
+        </p:nvPicPr>
+        <p:blipFill>
+          <a:blip r:embed="rId2">
+            <a:extLst>
+              <a:ext uri="{BEBA8EAE-BF5A-486C-A8C5-ECC9F3942E4B}">
+                <a14:imgProps xmlns:a14="http://schemas.microsoft.com/office/drawing/2010/main">
+                  <a14:imgLayer r:embed="rId3">
+                    <a14:imgEffect>
+                      <a14:brightnessContrast bright="-20000"/>
+                    </a14:imgEffect>
+                  </a14:imgLayer>
+                </a14:imgProps>
+              </a:ext>
+              <a:ext uri="{28A0092B-C50C-407E-A947-70E740481C1C}">
+                <a14:useLocalDpi xmlns:a14="http://schemas.microsoft.com/office/drawing/2010/main" val="0"/>
+              </a:ext>
+            </a:extLst>
+          </a:blip>
+          <a:srcRect/>
+          <a:stretch>
+            <a:fillRect/>
+          </a:stretch>
+        </p:blipFill>
+        <p:spPr bwMode="auto">
+          <a:xfrm>
+            <a:off x="0" y="0"/>
+            <a:ext cx="12192000" cy="6858000"/>
+          </a:xfrm>
+          <a:prstGeom prst="rect">
+            <a:avLst/>
+          </a:prstGeom>
+          <a:noFill/>
+          <a:extLst>
+            <a:ext uri="{909E8E84-426E-40DD-AFC4-6F175D3DCCD1}">
+              <a14:hiddenFill xmlns:a14="http://schemas.microsoft.com/office/drawing/2010/main">
+                <a:solidFill>
+                  <a:srgbClr val="FFFFFF"/>
+                </a:solidFill>
+              </a14:hiddenFill>
+            </a:ext>
+          </a:extLst>
+        </p:spPr>
+      </p:pic>
+      <p:sp>
+        <p:nvSpPr>
+          <p:cNvPr id="2" name="Titre 1">
+            <a:extLst>
+              <a:ext uri="{FF2B5EF4-FFF2-40B4-BE49-F238E27FC236}">
+                <a16:creationId xmlns:a16="http://schemas.microsoft.com/office/drawing/2014/main" id="{D825A028-A124-11E0-B06B-7896F6156B70}"/>
+              </a:ext>
+            </a:extLst>
+          </p:cNvPr>
+          <p:cNvSpPr>
+            <a:spLocks noGrp="1"/>
+          </p:cNvSpPr>
+          <p:nvPr>
+            <p:ph type="title"/>
+          </p:nvPr>
+        </p:nvSpPr>
+        <p:spPr/>
+        <p:txBody>
+          <a:bodyPr/>
+          <a:lstStyle/>
+          <a:p>
+            <a:endParaRPr lang="fr-CA"/>
+          </a:p>
+        </p:txBody>
+      </p:sp>
+      <p:sp>
+        <p:nvSpPr>
+          <p:cNvPr id="3" name="Espace réservé du contenu 2">
+            <a:extLst>
+              <a:ext uri="{FF2B5EF4-FFF2-40B4-BE49-F238E27FC236}">
+                <a16:creationId xmlns:a16="http://schemas.microsoft.com/office/drawing/2014/main" id="{75BE7A8F-19F1-D622-2EC6-565A5EB3B3F3}"/>
+              </a:ext>
+            </a:extLst>
+          </p:cNvPr>
+          <p:cNvSpPr>
+            <a:spLocks noGrp="1"/>
+          </p:cNvSpPr>
+          <p:nvPr>
+            <p:ph idx="1"/>
+          </p:nvPr>
+        </p:nvSpPr>
+        <p:spPr/>
+        <p:txBody>
+          <a:bodyPr/>
+          <a:lstStyle/>
+          <a:p>
+            <a:endParaRPr lang="fr-CA"/>
+          </a:p>
+        </p:txBody>
+      </p:sp>
+    </p:spTree>
+    <p:extLst>
+      <p:ext uri="{BB962C8B-B14F-4D97-AF65-F5344CB8AC3E}">
+        <p14:creationId xmlns:p14="http://schemas.microsoft.com/office/powerpoint/2010/main" val="3197126490"/>
       </p:ext>
     </p:extLst>
   </p:cSld>

--- a/FitBin.pptx
+++ b/FitBin.pptx
@@ -3501,8 +3501,8 @@
         </p:nvSpPr>
         <p:spPr>
           <a:xfrm>
-            <a:off x="3962399" y="633366"/>
-            <a:ext cx="7724776" cy="2867026"/>
+            <a:off x="3962399" y="1928674"/>
+            <a:ext cx="7724776" cy="1571718"/>
           </a:xfrm>
         </p:spPr>
         <p:txBody>
@@ -3716,15 +3716,15 @@
               </a:ext>
             </a:extLst>
           </a:blip>
-          <a:srcRect l="46151" t="63649" r="41494" b="20167"/>
+          <a:srcRect l="42397" t="63649" r="41493" b="20167"/>
           <a:stretch>
             <a:fillRect/>
           </a:stretch>
         </p:blipFill>
         <p:spPr bwMode="auto">
           <a:xfrm>
-            <a:off x="0" y="-1"/>
-            <a:ext cx="5273749" cy="6858001"/>
+            <a:off x="-1602556" y="-1"/>
+            <a:ext cx="6876306" cy="6858001"/>
           </a:xfrm>
           <a:prstGeom prst="rect">
             <a:avLst/>
@@ -3773,15 +3773,69 @@
               </a:ext>
             </a:extLst>
           </a:blip>
-          <a:srcRect l="45725" t="63194" r="42642" b="18953"/>
+          <a:srcRect l="42850" t="63194" r="42642" b="18953"/>
           <a:stretch>
             <a:fillRect/>
           </a:stretch>
         </p:blipFill>
         <p:spPr bwMode="auto">
           <a:xfrm>
-            <a:off x="0" y="0"/>
-            <a:ext cx="4501692" cy="6858000"/>
+            <a:off x="-1112363" y="0"/>
+            <a:ext cx="5614055" cy="6858000"/>
+          </a:xfrm>
+          <a:prstGeom prst="rect">
+            <a:avLst/>
+          </a:prstGeom>
+          <a:noFill/>
+          <a:extLst>
+            <a:ext uri="{909E8E84-426E-40DD-AFC4-6F175D3DCCD1}">
+              <a14:hiddenFill xmlns:a14="http://schemas.microsoft.com/office/drawing/2010/main">
+                <a:solidFill>
+                  <a:srgbClr val="FFFFFF"/>
+                </a:solidFill>
+              </a14:hiddenFill>
+            </a:ext>
+          </a:extLst>
+        </p:spPr>
+      </p:pic>
+      <p:pic>
+        <p:nvPicPr>
+          <p:cNvPr id="6" name="Picture 6" descr="Ever wonder why your mouse cursor is slanted? | by ajiitha | Prototypr">
+            <a:extLst>
+              <a:ext uri="{FF2B5EF4-FFF2-40B4-BE49-F238E27FC236}">
+                <a16:creationId xmlns:a16="http://schemas.microsoft.com/office/drawing/2014/main" id="{82FB55CF-77B7-BD15-E45E-6892E140F283}"/>
+              </a:ext>
+            </a:extLst>
+          </p:cNvPr>
+          <p:cNvPicPr>
+            <a:picLocks noChangeAspect="1" noChangeArrowheads="1"/>
+          </p:cNvPicPr>
+          <p:nvPr/>
+        </p:nvPicPr>
+        <p:blipFill>
+          <a:blip r:embed="rId9">
+            <a:duotone>
+              <a:prstClr val="black"/>
+              <a:schemeClr val="tx2">
+                <a:tint val="45000"/>
+                <a:satMod val="400000"/>
+              </a:schemeClr>
+            </a:duotone>
+            <a:extLst>
+              <a:ext uri="{28A0092B-C50C-407E-A947-70E740481C1C}">
+                <a14:useLocalDpi xmlns:a14="http://schemas.microsoft.com/office/drawing/2010/main" val="0"/>
+              </a:ext>
+            </a:extLst>
+          </a:blip>
+          <a:srcRect/>
+          <a:stretch>
+            <a:fillRect/>
+          </a:stretch>
+        </p:blipFill>
+        <p:spPr bwMode="auto">
+          <a:xfrm>
+            <a:off x="9499079" y="10335604"/>
+            <a:ext cx="1732039" cy="2474341"/>
           </a:xfrm>
           <a:prstGeom prst="rect">
             <a:avLst/>
@@ -4215,6 +4269,119 @@
           </a:extLst>
         </p:spPr>
       </p:pic>
+      <p:pic>
+        <p:nvPicPr>
+          <p:cNvPr id="4" name="Picture 2" descr="Passionné de sports ! - Scan-R">
+            <a:extLst>
+              <a:ext uri="{FF2B5EF4-FFF2-40B4-BE49-F238E27FC236}">
+                <a16:creationId xmlns:a16="http://schemas.microsoft.com/office/drawing/2014/main" id="{7CD6A5DE-C495-8EF2-14CD-508C49FCFD25}"/>
+              </a:ext>
+            </a:extLst>
+          </p:cNvPr>
+          <p:cNvPicPr>
+            <a:picLocks noChangeAspect="1" noChangeArrowheads="1"/>
+          </p:cNvPicPr>
+          <p:nvPr/>
+        </p:nvPicPr>
+        <p:blipFill rotWithShape="1">
+          <a:blip r:embed="rId7">
+            <a:extLst>
+              <a:ext uri="{BEBA8EAE-BF5A-486C-A8C5-ECC9F3942E4B}">
+                <a14:imgProps xmlns:a14="http://schemas.microsoft.com/office/drawing/2010/main">
+                  <a14:imgLayer r:embed="rId8">
+                    <a14:imgEffect>
+                      <a14:artisticBlur radius="16"/>
+                    </a14:imgEffect>
+                  </a14:imgLayer>
+                </a14:imgProps>
+              </a:ext>
+              <a:ext uri="{28A0092B-C50C-407E-A947-70E740481C1C}">
+                <a14:useLocalDpi xmlns:a14="http://schemas.microsoft.com/office/drawing/2010/main" val="0"/>
+              </a:ext>
+            </a:extLst>
+          </a:blip>
+          <a:srcRect l="42397" t="63649" r="41493" b="20167"/>
+          <a:stretch>
+            <a:fillRect/>
+          </a:stretch>
+        </p:blipFill>
+        <p:spPr bwMode="auto">
+          <a:xfrm>
+            <a:off x="11914512" y="0"/>
+            <a:ext cx="6876306" cy="6858001"/>
+          </a:xfrm>
+          <a:prstGeom prst="rect">
+            <a:avLst/>
+          </a:prstGeom>
+          <a:noFill/>
+          <a:extLst>
+            <a:ext uri="{909E8E84-426E-40DD-AFC4-6F175D3DCCD1}">
+              <a14:hiddenFill xmlns:a14="http://schemas.microsoft.com/office/drawing/2010/main">
+                <a:solidFill>
+                  <a:srgbClr val="FFFFFF"/>
+                </a:solidFill>
+              </a14:hiddenFill>
+            </a:ext>
+          </a:extLst>
+        </p:spPr>
+      </p:pic>
+      <p:pic>
+        <p:nvPicPr>
+          <p:cNvPr id="6" name="Picture 2" descr="Passionné de sports ! - Scan-R">
+            <a:extLst>
+              <a:ext uri="{FF2B5EF4-FFF2-40B4-BE49-F238E27FC236}">
+                <a16:creationId xmlns:a16="http://schemas.microsoft.com/office/drawing/2014/main" id="{B942DD74-569B-D987-3E28-A5EB191F5697}"/>
+              </a:ext>
+            </a:extLst>
+          </p:cNvPr>
+          <p:cNvPicPr>
+            <a:picLocks noChangeAspect="1" noChangeArrowheads="1"/>
+          </p:cNvPicPr>
+          <p:nvPr/>
+        </p:nvPicPr>
+        <p:blipFill rotWithShape="1">
+          <a:blip r:embed="rId9">
+            <a:lum bright="70000" contrast="-70000"/>
+            <a:extLst>
+              <a:ext uri="{BEBA8EAE-BF5A-486C-A8C5-ECC9F3942E4B}">
+                <a14:imgProps xmlns:a14="http://schemas.microsoft.com/office/drawing/2010/main">
+                  <a14:imgLayer r:embed="rId8">
+                    <a14:imgEffect>
+                      <a14:artisticBlur radius="5"/>
+                    </a14:imgEffect>
+                  </a14:imgLayer>
+                </a14:imgProps>
+              </a:ext>
+              <a:ext uri="{28A0092B-C50C-407E-A947-70E740481C1C}">
+                <a14:useLocalDpi xmlns:a14="http://schemas.microsoft.com/office/drawing/2010/main" val="0"/>
+              </a:ext>
+            </a:extLst>
+          </a:blip>
+          <a:srcRect l="42850" t="63194" r="42642" b="18953"/>
+          <a:stretch>
+            <a:fillRect/>
+          </a:stretch>
+        </p:blipFill>
+        <p:spPr bwMode="auto">
+          <a:xfrm>
+            <a:off x="12404705" y="1"/>
+            <a:ext cx="5614055" cy="6858000"/>
+          </a:xfrm>
+          <a:prstGeom prst="rect">
+            <a:avLst/>
+          </a:prstGeom>
+          <a:noFill/>
+          <a:extLst>
+            <a:ext uri="{909E8E84-426E-40DD-AFC4-6F175D3DCCD1}">
+              <a14:hiddenFill xmlns:a14="http://schemas.microsoft.com/office/drawing/2010/main">
+                <a:solidFill>
+                  <a:srgbClr val="FFFFFF"/>
+                </a:solidFill>
+              </a14:hiddenFill>
+            </a:ext>
+          </a:extLst>
+        </p:spPr>
+      </p:pic>
     </p:spTree>
     <p:extLst>
       <p:ext uri="{BB962C8B-B14F-4D97-AF65-F5344CB8AC3E}">
@@ -4225,6 +4392,18 @@
   <p:clrMapOvr>
     <a:masterClrMapping/>
   </p:clrMapOvr>
+  <mc:AlternateContent xmlns:mc="http://schemas.openxmlformats.org/markup-compatibility/2006">
+    <mc:Choice xmlns:p159="http://schemas.microsoft.com/office/powerpoint/2015/09/main" Requires="p159">
+      <p:transition xmlns:p14="http://schemas.microsoft.com/office/powerpoint/2010/main" spd="slow" p14:dur="2000">
+        <p159:morph option="byObject"/>
+      </p:transition>
+    </mc:Choice>
+    <mc:Fallback>
+      <p:transition spd="slow">
+        <p:fade/>
+      </p:transition>
+    </mc:Fallback>
+  </mc:AlternateContent>
 </p:sld>
 </file>
 
